--- a/week3_evaluation/slides.pptx
+++ b/week3_evaluation/slides.pptx
@@ -792,7 +792,72 @@
           <a:lstStyle/>
           <a:p>
             <a:r>
-              <a:t>Spend 4-5 minutes on these cautionary tales. Wallach and Heifets 2018 is an important paper: Most Ligand-Based Virtual Screening Benchmarks Reward Memorization. They showed that many published models were not learning chemistry, they were memorizing molecular series. The key message: if your model looks too good to be true, it probably is.</a:t>
+              <a:t>Spend 4-5 minutes on these cautionary tales.</a:t>
+            </a:r>
+          </a:p>
+          <a:p/>
+          <a:p>
+            <a:r>
+              <a:t>Wallach and Heifets 2018 is an important paper: 'Most Ligand-Based Virtual Screening Benchmarks Reward Memorization.' They showed that many published models were not learning chemistry, they were memorizing molecular series.</a:t>
+            </a:r>
+          </a:p>
+          <a:p/>
+          <a:p>
+            <a:r>
+              <a:t>=== NEUROSCIENCE EXAMPLE ===</a:t>
+            </a:r>
+          </a:p>
+          <a:p>
+            <a:r>
+              <a:t>The GABA-A receptor example is particularly relevant:</a:t>
+            </a:r>
+          </a:p>
+          <a:p>
+            <a:r>
+              <a:t>- GABA-A is the main inhibitory receptor in the brain (same Cys-loop family as GluCl from Dr. Serbe-Kamp's research)</a:t>
+            </a:r>
+          </a:p>
+          <a:p>
+            <a:r>
+              <a:t>- Many GABA-A modulators are benzodiazepines: diazepam, alprazolam, clonazepam, etc.</a:t>
+            </a:r>
+          </a:p>
+          <a:p>
+            <a:r>
+              <a:t>- Benzodiazepines all share a very similar core scaffold (1,4-benzodiazepine ring)</a:t>
+            </a:r>
+          </a:p>
+          <a:p>
+            <a:r>
+              <a:t>- A model trained on a dataset dominated by benzodiazepines will learn to recognize the benzodiazepine scaffold</a:t>
+            </a:r>
+          </a:p>
+          <a:p>
+            <a:r>
+              <a:t>- On a random split: high performance (because benzodiazepines appear in both train and test)</a:t>
+            </a:r>
+          </a:p>
+          <a:p>
+            <a:r>
+              <a:t>- On a scaffold split: performance drops dramatically for non-benzodiazepine GABA-A modulators (e.g., neurosteroids, barbiturates, Z-drugs like zolpidem)</a:t>
+            </a:r>
+          </a:p>
+          <a:p/>
+          <a:p>
+            <a:r>
+              <a:t>This is exactly the scaffold bias problem: the model learns the scaffold, not the binding mechanism.</a:t>
+            </a:r>
+          </a:p>
+          <a:p/>
+          <a:p>
+            <a:r>
+              <a:t>Another neuroscience example: ML models for predicting blood-brain barrier (BBB) penetration. Many published models have inflated performance because the training data is biased toward known CNS drugs. When tested on structurally novel compounds, performance drops significantly (Goyal et al. 2022, Drug Discovery Today 27:103359).</a:t>
+            </a:r>
+          </a:p>
+          <a:p/>
+          <a:p>
+            <a:r>
+              <a:t>Key message: if your model looks too good to be true, it probably is.</a:t>
             </a:r>
           </a:p>
         </p:txBody>
@@ -5355,7 +5420,7 @@
               </a:defRPr>
             </a:pPr>
             <a:r>
-              <a:t>Example 1: A QSAR model for hERG toxicity achieved 95% accuracy on a random test set. But it was memorizing chemical series. On novel scaffolds: 60%. Example 2: Published AUC-ROC 0.97 but dataset had duplicates. Remove duplicates: 0.72. Example 3: Scaffold split vs random: AUROC dropped from 0.92 to 0.75. Lesson: ALWAYS validate properly. Ref: Wallach &amp; Heifets (2018).</a:t>
+              <a:t>Example 1: A QSAR model for hERG toxicity achieved 95% accuracy on a random test set. But it was memorizing chemical series. On novel scaffolds: 60%. Example 2: Published AUC-ROC 0.97 but dataset had duplicates. Remove duplicates: 0.72. Example 3: Scaffold split vs random: AUROC dropped from 0.92 to 0.75. Example 4 (Neuroscience): A model to predict GABA-A receptor binding looked great on paper, but it had learned to recognize benzodiazepine scaffolds, not actual binding features. On novel chemotypes: near-random. Lesson: ALWAYS validate properly. Ref: Wallach &amp; Heifets (2018).</a:t>
             </a:r>
           </a:p>
         </p:txBody>
